--- a/JavaScript/sliders/JavaScript lekce 13_ru.pptx
+++ b/JavaScript/sliders/JavaScript lekce 13_ru.pptx
@@ -10098,7 +10098,7 @@
         <p:spPr>
           <a:xfrm>
             <a:off x="0" y="0"/>
-            <a:ext cx="8927100" cy="5110200"/>
+            <a:ext cx="8927100" cy="5048700"/>
           </a:xfrm>
           <a:prstGeom prst="rect">
             <a:avLst/>
@@ -10268,7 +10268,20 @@
               <a:buNone/>
             </a:pPr>
             <a:r>
-              <a:t/>
+              <a:rPr b="1" lang="cs" sz="1600">
+                <a:solidFill>
+                  <a:srgbClr val="2B3990"/>
+                </a:solidFill>
+              </a:rPr>
+              <a:t>@latest</a:t>
+            </a:r>
+            <a:r>
+              <a:rPr lang="cs" sz="1600">
+                <a:solidFill>
+                  <a:srgbClr val="2B3990"/>
+                </a:solidFill>
+              </a:rPr>
+              <a:t> означает самая новая версия приложения Vite.</a:t>
             </a:r>
             <a:endParaRPr sz="1600">
               <a:solidFill>
@@ -10287,20 +10300,7 @@
               <a:buNone/>
             </a:pPr>
             <a:r>
-              <a:rPr b="1" lang="cs" sz="1600">
-                <a:solidFill>
-                  <a:srgbClr val="2B3990"/>
-                </a:solidFill>
-              </a:rPr>
-              <a:t>@latest</a:t>
-            </a:r>
-            <a:r>
-              <a:rPr lang="cs" sz="1600">
-                <a:solidFill>
-                  <a:srgbClr val="2B3990"/>
-                </a:solidFill>
-              </a:rPr>
-              <a:t> означает самая новая версия приложения Vite.</a:t>
+              <a:t/>
             </a:r>
             <a:endParaRPr sz="1600">
               <a:solidFill>
@@ -10319,25 +10319,6 @@
               <a:buNone/>
             </a:pPr>
             <a:r>
-              <a:t/>
-            </a:r>
-            <a:endParaRPr sz="1600">
-              <a:solidFill>
-                <a:srgbClr val="2B3990"/>
-              </a:solidFill>
-            </a:endParaRPr>
-          </a:p>
-          <a:p>
-            <a:pPr indent="0" lvl="0" marL="0" rtl="0" algn="l">
-              <a:spcBef>
-                <a:spcPts val="0"/>
-              </a:spcBef>
-              <a:spcAft>
-                <a:spcPts val="0"/>
-              </a:spcAft>
-              <a:buNone/>
-            </a:pPr>
-            <a:r>
               <a:rPr b="1" lang="cs" sz="1600">
                 <a:solidFill>
                   <a:srgbClr val="2B3990"/>
@@ -10567,16 +10548,24 @@
                   <a:srgbClr val="2B3990"/>
                 </a:solidFill>
               </a:rPr>
-              <a:t>Install with npm and start now?</a:t>
-            </a:r>
-            <a:endParaRPr b="1" sz="1600">
+              <a:t>Install with npm and start now? -Yes: </a:t>
+            </a:r>
+            <a:r>
+              <a:rPr lang="cs" sz="1200">
+                <a:solidFill>
+                  <a:srgbClr val="2B3990"/>
+                </a:solidFill>
+              </a:rPr>
+              <a:t>автоматически всё сделает и запустить локальный сервер</a:t>
+            </a:r>
+            <a:endParaRPr sz="1200">
               <a:solidFill>
                 <a:srgbClr val="2B3990"/>
               </a:solidFill>
             </a:endParaRPr>
           </a:p>
           <a:p>
-            <a:pPr indent="0" lvl="0" marL="179999" rtl="0" algn="l">
+            <a:pPr indent="0" lvl="0" marL="457200" rtl="0" algn="l">
               <a:spcBef>
                 <a:spcPts val="0"/>
               </a:spcBef>
@@ -10586,7 +10575,52 @@
               <a:buNone/>
             </a:pPr>
             <a:r>
-              <a:t/>
+              <a:rPr lang="cs" sz="1200">
+                <a:solidFill>
+                  <a:srgbClr val="2B3990"/>
+                </a:solidFill>
+              </a:rPr>
+              <a:t>						       </a:t>
+            </a:r>
+            <a:r>
+              <a:rPr b="1" lang="cs" sz="1600">
+                <a:solidFill>
+                  <a:srgbClr val="2B3990"/>
+                </a:solidFill>
+              </a:rPr>
+              <a:t>- No: </a:t>
+            </a:r>
+            <a:r>
+              <a:rPr lang="cs" sz="1200">
+                <a:solidFill>
+                  <a:srgbClr val="2B3990"/>
+                </a:solidFill>
+              </a:rPr>
+              <a:t>самому нужно установить зависимость </a:t>
+            </a:r>
+            <a:r>
+              <a:rPr b="1" lang="cs" sz="1200">
+                <a:solidFill>
+                  <a:srgbClr val="2B3990"/>
+                </a:solidFill>
+              </a:rPr>
+              <a:t>npm install </a:t>
+            </a:r>
+            <a:r>
+              <a:rPr lang="cs" sz="1200">
+                <a:solidFill>
+                  <a:srgbClr val="2B3990"/>
+                </a:solidFill>
+              </a:rPr>
+              <a:t>и запустить локальный сервер </a:t>
+            </a:r>
+            <a:r>
+              <a:rPr b="1" lang="cs" sz="1200">
+                <a:solidFill>
+                  <a:srgbClr val="2B3990"/>
+                </a:solidFill>
+              </a:rPr>
+              <a:t>npm run dev</a:t>
             </a:r>
             <a:endParaRPr b="1" sz="1600">
               <a:solidFill>
